--- a/reports/CEO_summary.pptx
+++ b/reports/CEO_summary.pptx
@@ -6,9 +6,10 @@
   </p:sldMasterIdLst>
   <p:sldIdLst>
     <p:sldId id="256" r:id="rId2"/>
+    <p:sldId id="257" r:id="rId3"/>
   </p:sldIdLst>
   <p:notesMasterIdLst>
-    <p:notesMasterId r:id="rId3"/>
+    <p:notesMasterId r:id="rId4"/>
   </p:notesMasterIdLst>
   <p:sldSz cx="12192000" cy="6858000"/>
   <p:notesSz cx="6858000" cy="12192000"/>
@@ -107,9 +108,14 @@
   <p:extLst>
     <p:ext uri="{521415D9-36F7-43E2-AB2F-B90AF26B5E84}">
       <p14:sectionLst xmlns:p14="http://schemas.microsoft.com/office/powerpoint/2010/main">
-        <p14:section name="CEO summary" id="{78823edd-23fd-0aff-74cd-3bec10235007}">
+        <p14:section name="CEO summary" id="{24e796a2-222d-63f4-2a40-1d2eaf2cce54}">
           <p14:sldIdLst>
             <p14:sldId id="256"/>
+          </p14:sldIdLst>
+        </p14:section>
+        <p14:section name="Answers" id="{25b369a1-e68c-a2b3-acb9-904b301f5179}">
+          <p14:sldIdLst>
+            <p14:sldId id="257"/>
           </p14:sldIdLst>
         </p14:section>
       </p14:sectionLst>
@@ -1078,6 +1084,94 @@
 </p:notes>
 </file>
 
+<file path=ppt/notesSlides/notesSlide2.xml><?xml version="1.0" encoding="utf-8"?>
+<p:notes xmlns:a="http://schemas.openxmlformats.org/drawingml/2006/main" xmlns:r="http://schemas.openxmlformats.org/officeDocument/2006/relationships" xmlns:p="http://schemas.openxmlformats.org/presentationml/2006/main">
+  <p:cSld>
+    <p:spTree>
+      <p:nvGrpSpPr>
+        <p:cNvPr id="1" name=""/>
+        <p:cNvGrpSpPr/>
+        <p:nvPr/>
+      </p:nvGrpSpPr>
+      <p:grpSpPr>
+        <a:xfrm>
+          <a:off x="0" y="0"/>
+          <a:ext cx="0" cy="0"/>
+          <a:chOff x="0" y="0"/>
+          <a:chExt cx="0" cy="0"/>
+        </a:xfrm>
+      </p:grpSpPr>
+      <p:sp>
+        <p:nvSpPr>
+          <p:cNvPr id="2" name="Slide Image Placeholder 1"/>
+          <p:cNvSpPr>
+            <a:spLocks noGrp="1" noRot="1" noChangeAspect="1"/>
+          </p:cNvSpPr>
+          <p:nvPr>
+            <p:ph type="sldImg"/>
+          </p:nvPr>
+        </p:nvSpPr>
+        <p:spPr/>
+      </p:sp>
+      <p:sp>
+        <p:nvSpPr>
+          <p:cNvPr id="3" name="Notes Placeholder 2"/>
+          <p:cNvSpPr>
+            <a:spLocks noGrp="1"/>
+          </p:cNvSpPr>
+          <p:nvPr>
+            <p:ph type="body" idx="1"/>
+          </p:nvPr>
+        </p:nvSpPr>
+        <p:spPr/>
+        <p:txBody>
+          <a:bodyPr/>
+          <a:lstStyle/>
+          <a:p>
+            <a:r>
+              <a:rPr lang="en-US" dirty="0"/>
+              <a:t>Q1: decompose the KPI into activation rate × spend per spending card (Shapley split). 69% of the ₹8,000 drop is zero-spend dilution; 31% is lower spend per spender, concentrated in May–June. Q2: new cards under 3 months have a median spend of ₹0 and account for at least 64% of zero-spend cards. Q3: see page 1. Flag the cross-table unit inconsistency as a question for the data owners.</a:t>
+            </a:r>
+            <a:endParaRPr lang="en-US" dirty="0"/>
+          </a:p>
+        </p:txBody>
+      </p:sp>
+      <p:sp>
+        <p:nvSpPr>
+          <p:cNvPr id="4" name="Slide Number Placeholder 3"/>
+          <p:cNvSpPr>
+            <a:spLocks noGrp="1"/>
+          </p:cNvSpPr>
+          <p:nvPr>
+            <p:ph type="sldNum" sz="quarter" idx="10"/>
+          </p:nvPr>
+        </p:nvSpPr>
+        <p:spPr/>
+        <p:txBody>
+          <a:bodyPr/>
+          <a:lstStyle/>
+          <a:p>
+            <a:fld id="{F7021451-1387-4CA6-816F-3879F97B5CBC}" type="slidenum">
+              <a:rPr lang="en-US"/>
+              <a:t>2</a:t>
+            </a:fld>
+            <a:endParaRPr lang="en-US"/>
+          </a:p>
+        </p:txBody>
+      </p:sp>
+    </p:spTree>
+    <p:extLst>
+      <p:ext uri="{BB962C8B-B14F-4D97-AF65-F5344CB8AC3E}">
+        <p14:creationId xmlns:p14="http://schemas.microsoft.com/office/powerpoint/2010/main" val="1024086991"/>
+      </p:ext>
+    </p:extLst>
+  </p:cSld>
+  <p:clrMapOvr>
+    <a:masterClrMapping/>
+  </p:clrMapOvr>
+</p:notes>
+</file>
+
 <file path=ppt/slideLayouts/slideLayout1.xml><?xml version="1.0" encoding="utf-8"?>
 <p:sldLayout xmlns:a="http://schemas.openxmlformats.org/drawingml/2006/main" xmlns:r="http://schemas.openxmlformats.org/officeDocument/2006/relationships" xmlns:p="http://schemas.openxmlformats.org/presentationml/2006/main" preserve="1">
   <p:cSld name="DEFAULT">
@@ -2548,6 +2642,920 @@
               <a:t>Track spend per spender and travel share monthly against last year before running any travel campaign.</a:t>
             </a:r>
             <a:endParaRPr lang="en-US" sz="1050" dirty="0"/>
+          </a:p>
+        </p:txBody>
+      </p:sp>
+    </p:spTree>
+  </p:cSld>
+  <p:clrMapOvr>
+    <a:masterClrMapping/>
+  </p:clrMapOvr>
+</p:sld>
+</file>
+
+<file path=ppt/slides/slide2.xml><?xml version="1.0" encoding="utf-8"?>
+<p:sld xmlns:a="http://schemas.openxmlformats.org/drawingml/2006/main" xmlns:r="http://schemas.openxmlformats.org/officeDocument/2006/relationships" xmlns:p="http://schemas.openxmlformats.org/presentationml/2006/main">
+  <p:cSld name="Slide 2">
+    <p:spTree>
+      <p:nvGrpSpPr>
+        <p:cNvPr id="1" name=""/>
+        <p:cNvGrpSpPr/>
+        <p:nvPr/>
+      </p:nvGrpSpPr>
+      <p:grpSpPr>
+        <a:xfrm>
+          <a:off x="0" y="0"/>
+          <a:ext cx="0" cy="0"/>
+          <a:chOff x="0" y="0"/>
+          <a:chExt cx="0" cy="0"/>
+        </a:xfrm>
+      </p:grpSpPr>
+      <p:sp>
+        <p:nvSpPr>
+          <p:cNvPr id="2" name="Header band"/>
+          <p:cNvSpPr/>
+          <p:nvPr/>
+        </p:nvSpPr>
+        <p:spPr>
+          <a:xfrm>
+            <a:off x="0" y="0"/>
+            <a:ext cx="12188952" cy="1143000"/>
+          </a:xfrm>
+          <a:prstGeom prst="rect">
+            <a:avLst/>
+          </a:prstGeom>
+          <a:solidFill>
+            <a:schemeClr val="tx2"/>
+          </a:solidFill>
+          <a:ln w="12700">
+            <a:solidFill>
+              <a:schemeClr val="tx2"/>
+            </a:solidFill>
+            <a:prstDash val="solid"/>
+          </a:ln>
+        </p:spPr>
+      </p:sp>
+      <p:sp>
+        <p:nvSpPr>
+          <p:cNvPr id="3" name="Kicker"/>
+          <p:cNvSpPr txBox="1"/>
+          <p:nvPr/>
+        </p:nvSpPr>
+        <p:spPr>
+          <a:xfrm>
+            <a:off x="457200" y="201168"/>
+            <a:ext cx="10972800" cy="274320"/>
+          </a:xfrm>
+          <a:prstGeom prst="rect">
+            <a:avLst/>
+          </a:prstGeom>
+          <a:noFill/>
+          <a:ln/>
+        </p:spPr>
+        <p:txBody>
+          <a:bodyPr wrap="square" lIns="0" tIns="0" rIns="0" bIns="0" rtlCol="0" anchor="ctr"/>
+          <a:lstStyle/>
+          <a:p>
+            <a:pPr indent="0" marL="0">
+              <a:buNone/>
+            </a:pPr>
+            <a:r>
+              <a:rPr lang="en-US" sz="1100" b="1" spc="200" kern="0" dirty="0">
+                <a:solidFill>
+                  <a:srgbClr val="A9C8F0"/>
+                </a:solidFill>
+              </a:rPr>
+              <a:t>ANSWERS  ·  Q1 – Q3</a:t>
+            </a:r>
+            <a:endParaRPr lang="en-US" sz="1100" dirty="0"/>
+          </a:p>
+        </p:txBody>
+      </p:sp>
+      <p:sp>
+        <p:nvSpPr>
+          <p:cNvPr id="4" name="Headline"/>
+          <p:cNvSpPr txBox="1"/>
+          <p:nvPr/>
+        </p:nvSpPr>
+        <p:spPr>
+          <a:xfrm>
+            <a:off x="457200" y="475488"/>
+            <a:ext cx="11247120" cy="548640"/>
+          </a:xfrm>
+          <a:prstGeom prst="rect">
+            <a:avLst/>
+          </a:prstGeom>
+          <a:noFill/>
+          <a:ln/>
+        </p:spPr>
+        <p:txBody>
+          <a:bodyPr wrap="square" lIns="0" tIns="0" rIns="0" bIns="0" rtlCol="0" anchor="ctr"/>
+          <a:lstStyle/>
+          <a:p>
+            <a:pPr indent="0" marL="0">
+              <a:buNone/>
+            </a:pPr>
+            <a:r>
+              <a:rPr lang="en-US" sz="2400" b="1" dirty="0">
+                <a:solidFill>
+                  <a:schemeClr val="bg1"/>
+                </a:solidFill>
+              </a:rPr>
+              <a:t>The decline is mostly mechanical, and new-card activation is the biggest driver</a:t>
+            </a:r>
+            <a:endParaRPr lang="en-US" sz="2400" dirty="0"/>
+          </a:p>
+        </p:txBody>
+      </p:sp>
+      <p:sp>
+        <p:nvSpPr>
+          <p:cNvPr id="5" name="Q1 card"/>
+          <p:cNvSpPr/>
+          <p:nvPr/>
+        </p:nvSpPr>
+        <p:spPr>
+          <a:xfrm>
+            <a:off x="457200" y="1371600"/>
+            <a:ext cx="3611880" cy="4343400"/>
+          </a:xfrm>
+          <a:prstGeom prst="rect">
+            <a:avLst/>
+          </a:prstGeom>
+          <a:solidFill>
+            <a:schemeClr val="bg2"/>
+          </a:solidFill>
+          <a:ln w="12700">
+            <a:solidFill>
+              <a:schemeClr val="bg2"/>
+            </a:solidFill>
+            <a:prstDash val="solid"/>
+          </a:ln>
+        </p:spPr>
+      </p:sp>
+      <p:sp>
+        <p:nvSpPr>
+          <p:cNvPr id="6" name="Q1 bar"/>
+          <p:cNvSpPr/>
+          <p:nvPr/>
+        </p:nvSpPr>
+        <p:spPr>
+          <a:xfrm>
+            <a:off x="457200" y="1371600"/>
+            <a:ext cx="3611880" cy="64008"/>
+          </a:xfrm>
+          <a:prstGeom prst="rect">
+            <a:avLst/>
+          </a:prstGeom>
+          <a:solidFill>
+            <a:schemeClr val="accent2"/>
+          </a:solidFill>
+          <a:ln w="12700">
+            <a:solidFill>
+              <a:schemeClr val="accent2"/>
+            </a:solidFill>
+            <a:prstDash val="solid"/>
+          </a:ln>
+        </p:spPr>
+      </p:sp>
+      <p:sp>
+        <p:nvSpPr>
+          <p:cNvPr id="7" name="Q1 label"/>
+          <p:cNvSpPr txBox="1"/>
+          <p:nvPr/>
+        </p:nvSpPr>
+        <p:spPr>
+          <a:xfrm>
+            <a:off x="685800" y="1554480"/>
+            <a:ext cx="731520" cy="365760"/>
+          </a:xfrm>
+          <a:prstGeom prst="rect">
+            <a:avLst/>
+          </a:prstGeom>
+          <a:noFill/>
+          <a:ln/>
+        </p:spPr>
+        <p:txBody>
+          <a:bodyPr wrap="square" lIns="0" tIns="0" rIns="0" bIns="0" rtlCol="0" anchor="ctr"/>
+          <a:lstStyle/>
+          <a:p>
+            <a:pPr indent="0" marL="0">
+              <a:buNone/>
+            </a:pPr>
+            <a:r>
+              <a:rPr lang="en-US" sz="2000" b="1" dirty="0">
+                <a:solidFill>
+                  <a:schemeClr val="tx2"/>
+                </a:solidFill>
+              </a:rPr>
+              <a:t>Q1</a:t>
+            </a:r>
+            <a:endParaRPr lang="en-US" sz="2000" dirty="0"/>
+          </a:p>
+        </p:txBody>
+      </p:sp>
+      <p:sp>
+        <p:nvSpPr>
+          <p:cNvPr id="8" name="Q1 question"/>
+          <p:cNvSpPr txBox="1"/>
+          <p:nvPr/>
+        </p:nvSpPr>
+        <p:spPr>
+          <a:xfrm>
+            <a:off x="1325880" y="1554480"/>
+            <a:ext cx="2606040" cy="411480"/>
+          </a:xfrm>
+          <a:prstGeom prst="rect">
+            <a:avLst/>
+          </a:prstGeom>
+          <a:noFill/>
+          <a:ln/>
+        </p:spPr>
+        <p:txBody>
+          <a:bodyPr wrap="square" lIns="0" tIns="0" rIns="0" bIns="0" rtlCol="0" anchor="ctr"/>
+          <a:lstStyle/>
+          <a:p>
+            <a:pPr indent="0" marL="0">
+              <a:buNone/>
+            </a:pPr>
+            <a:r>
+              <a:rPr lang="en-US" sz="1250" b="1" dirty="0">
+                <a:solidFill>
+                  <a:schemeClr val="tx1"/>
+                </a:solidFill>
+              </a:rPr>
+              <a:t>Is the spend decline real or mechanical?</a:t>
+            </a:r>
+            <a:endParaRPr lang="en-US" sz="1250" dirty="0"/>
+          </a:p>
+        </p:txBody>
+      </p:sp>
+      <p:sp>
+        <p:nvSpPr>
+          <p:cNvPr id="9" name="Q1 verdict"/>
+          <p:cNvSpPr txBox="1"/>
+          <p:nvPr/>
+        </p:nvSpPr>
+        <p:spPr>
+          <a:xfrm>
+            <a:off x="685800" y="2057400"/>
+            <a:ext cx="3200400" cy="685800"/>
+          </a:xfrm>
+          <a:prstGeom prst="rect">
+            <a:avLst/>
+          </a:prstGeom>
+          <a:noFill/>
+          <a:ln/>
+        </p:spPr>
+        <p:txBody>
+          <a:bodyPr wrap="square" lIns="0" tIns="0" rIns="0" bIns="0" rtlCol="0" anchor="t"/>
+          <a:lstStyle/>
+          <a:p>
+            <a:pPr indent="0" marL="0">
+              <a:buNone/>
+            </a:pPr>
+            <a:r>
+              <a:rPr lang="en-US" sz="1300" b="1" dirty="0">
+                <a:solidFill>
+                  <a:schemeClr val="tx2"/>
+                </a:solidFill>
+              </a:rPr>
+              <a:t>Mostly mechanical (~70%), with a smaller real part that began in May.</a:t>
+            </a:r>
+            <a:endParaRPr lang="en-US" sz="1300" dirty="0"/>
+          </a:p>
+        </p:txBody>
+      </p:sp>
+      <p:sp>
+        <p:nvSpPr>
+          <p:cNvPr id="10" name="Q1 evidence"/>
+          <p:cNvSpPr txBox="1"/>
+          <p:nvPr/>
+        </p:nvSpPr>
+        <p:spPr>
+          <a:xfrm>
+            <a:off x="685800" y="2788920"/>
+            <a:ext cx="3246120" cy="2834640"/>
+          </a:xfrm>
+          <a:prstGeom prst="rect">
+            <a:avLst/>
+          </a:prstGeom>
+          <a:noFill/>
+          <a:ln/>
+        </p:spPr>
+        <p:txBody>
+          <a:bodyPr wrap="square" lIns="0" tIns="0" rIns="0" bIns="0" rtlCol="0" anchor="t"/>
+          <a:lstStyle/>
+          <a:p>
+            <a:pPr marL="342900" indent="-342900">
+              <a:spcAft>
+                <a:spcPts val="700"/>
+              </a:spcAft>
+              <a:buSzPct val="100000"/>
+              <a:buChar char="•"/>
+            </a:pPr>
+            <a:r>
+              <a:rPr lang="en-US" sz="1200" dirty="0">
+                <a:solidFill>
+                  <a:schemeClr val="accent5"/>
+                </a:solidFill>
+              </a:rPr>
+              <a:t>Spend per active card fell 16% (₹50.0K → ₹42.0K), while total spend rose 18% and active cards rose 40%.</a:t>
+            </a:r>
+            <a:endParaRPr lang="en-US" sz="1200" dirty="0"/>
+          </a:p>
+          <a:p>
+            <a:pPr marL="342900" indent="-342900">
+              <a:spcAft>
+                <a:spcPts val="700"/>
+              </a:spcAft>
+              <a:buSzPct val="100000"/>
+              <a:buChar char="•"/>
+            </a:pPr>
+            <a:r>
+              <a:rPr lang="en-US" sz="1200" dirty="0">
+                <a:solidFill>
+                  <a:schemeClr val="accent5"/>
+                </a:solidFill>
+              </a:rPr>
+              <a:t>KPI = activation rate × spend per spending card. Splitting the ₹8,000 drop: −₹5,533 (69%) from the zero-spend share rising 12% → 22%; −₹2,467 (31%) from lower spend per spending card.</a:t>
+            </a:r>
+            <a:endParaRPr lang="en-US" sz="1200" dirty="0"/>
+          </a:p>
+          <a:p>
+            <a:pPr marL="342900" indent="-342900">
+              <a:spcAft>
+                <a:spcPts val="700"/>
+              </a:spcAft>
+              <a:buSzPct val="100000"/>
+              <a:buChar char="•"/>
+            </a:pPr>
+            <a:r>
+              <a:rPr lang="en-US" sz="1200" dirty="0">
+                <a:solidFill>
+                  <a:schemeClr val="accent5"/>
+                </a:solidFill>
+              </a:rPr>
+              <a:t>Spend per spending card was flat at ~₹57K Jan–Apr and fell ~6% in May–Jun. That's the real part, and it coincides with travel falling from 20% to 11% of the mix.</a:t>
+            </a:r>
+            <a:endParaRPr lang="en-US" sz="1200" dirty="0"/>
+          </a:p>
+        </p:txBody>
+      </p:sp>
+      <p:sp>
+        <p:nvSpPr>
+          <p:cNvPr id="11" name="Q2 card"/>
+          <p:cNvSpPr/>
+          <p:nvPr/>
+        </p:nvSpPr>
+        <p:spPr>
+          <a:xfrm>
+            <a:off x="4251960" y="1371600"/>
+            <a:ext cx="3611880" cy="4343400"/>
+          </a:xfrm>
+          <a:prstGeom prst="rect">
+            <a:avLst/>
+          </a:prstGeom>
+          <a:solidFill>
+            <a:schemeClr val="bg2"/>
+          </a:solidFill>
+          <a:ln w="12700">
+            <a:solidFill>
+              <a:schemeClr val="bg2"/>
+            </a:solidFill>
+            <a:prstDash val="solid"/>
+          </a:ln>
+        </p:spPr>
+      </p:sp>
+      <p:sp>
+        <p:nvSpPr>
+          <p:cNvPr id="12" name="Q2 bar"/>
+          <p:cNvSpPr/>
+          <p:nvPr/>
+        </p:nvSpPr>
+        <p:spPr>
+          <a:xfrm>
+            <a:off x="4251960" y="1371600"/>
+            <a:ext cx="3611880" cy="64008"/>
+          </a:xfrm>
+          <a:prstGeom prst="rect">
+            <a:avLst/>
+          </a:prstGeom>
+          <a:solidFill>
+            <a:schemeClr val="accent1"/>
+          </a:solidFill>
+          <a:ln w="12700">
+            <a:solidFill>
+              <a:schemeClr val="accent1"/>
+            </a:solidFill>
+            <a:prstDash val="solid"/>
+          </a:ln>
+        </p:spPr>
+      </p:sp>
+      <p:sp>
+        <p:nvSpPr>
+          <p:cNvPr id="13" name="Q2 label"/>
+          <p:cNvSpPr txBox="1"/>
+          <p:nvPr/>
+        </p:nvSpPr>
+        <p:spPr>
+          <a:xfrm>
+            <a:off x="4480560" y="1554480"/>
+            <a:ext cx="731520" cy="365760"/>
+          </a:xfrm>
+          <a:prstGeom prst="rect">
+            <a:avLst/>
+          </a:prstGeom>
+          <a:noFill/>
+          <a:ln/>
+        </p:spPr>
+        <p:txBody>
+          <a:bodyPr wrap="square" lIns="0" tIns="0" rIns="0" bIns="0" rtlCol="0" anchor="ctr"/>
+          <a:lstStyle/>
+          <a:p>
+            <a:pPr indent="0" marL="0">
+              <a:buNone/>
+            </a:pPr>
+            <a:r>
+              <a:rPr lang="en-US" sz="2000" b="1" dirty="0">
+                <a:solidFill>
+                  <a:schemeClr val="tx2"/>
+                </a:solidFill>
+              </a:rPr>
+              <a:t>Q2</a:t>
+            </a:r>
+            <a:endParaRPr lang="en-US" sz="2000" dirty="0"/>
+          </a:p>
+        </p:txBody>
+      </p:sp>
+      <p:sp>
+        <p:nvSpPr>
+          <p:cNvPr id="14" name="Q2 question"/>
+          <p:cNvSpPr txBox="1"/>
+          <p:nvPr/>
+        </p:nvSpPr>
+        <p:spPr>
+          <a:xfrm>
+            <a:off x="5120640" y="1554480"/>
+            <a:ext cx="2606040" cy="411480"/>
+          </a:xfrm>
+          <a:prstGeom prst="rect">
+            <a:avLst/>
+          </a:prstGeom>
+          <a:noFill/>
+          <a:ln/>
+        </p:spPr>
+        <p:txBody>
+          <a:bodyPr wrap="square" lIns="0" tIns="0" rIns="0" bIns="0" rtlCol="0" anchor="ctr"/>
+          <a:lstStyle/>
+          <a:p>
+            <a:pPr indent="0" marL="0">
+              <a:buNone/>
+            </a:pPr>
+            <a:r>
+              <a:rPr lang="en-US" sz="1250" b="1" dirty="0">
+                <a:solidFill>
+                  <a:schemeClr val="tx1"/>
+                </a:solidFill>
+              </a:rPr>
+              <a:t>The single biggest driver</a:t>
+            </a:r>
+            <a:endParaRPr lang="en-US" sz="1250" dirty="0"/>
+          </a:p>
+        </p:txBody>
+      </p:sp>
+      <p:sp>
+        <p:nvSpPr>
+          <p:cNvPr id="15" name="Q2 verdict"/>
+          <p:cNvSpPr txBox="1"/>
+          <p:nvPr/>
+        </p:nvSpPr>
+        <p:spPr>
+          <a:xfrm>
+            <a:off x="4480560" y="2057400"/>
+            <a:ext cx="3200400" cy="685800"/>
+          </a:xfrm>
+          <a:prstGeom prst="rect">
+            <a:avLst/>
+          </a:prstGeom>
+          <a:noFill/>
+          <a:ln/>
+        </p:spPr>
+        <p:txBody>
+          <a:bodyPr wrap="square" lIns="0" tIns="0" rIns="0" bIns="0" rtlCol="0" anchor="t"/>
+          <a:lstStyle/>
+          <a:p>
+            <a:pPr indent="0" marL="0">
+              <a:buNone/>
+            </a:pPr>
+            <a:r>
+              <a:rPr lang="en-US" sz="1300" b="1" dirty="0">
+                <a:solidFill>
+                  <a:schemeClr val="tx2"/>
+                </a:solidFill>
+              </a:rPr>
+              <a:t>Fast new-card acquisition, with cards slow to start spending.</a:t>
+            </a:r>
+            <a:endParaRPr lang="en-US" sz="1300" dirty="0"/>
+          </a:p>
+        </p:txBody>
+      </p:sp>
+      <p:sp>
+        <p:nvSpPr>
+          <p:cNvPr id="16" name="Q2 evidence"/>
+          <p:cNvSpPr txBox="1"/>
+          <p:nvPr/>
+        </p:nvSpPr>
+        <p:spPr>
+          <a:xfrm>
+            <a:off x="4480560" y="2788920"/>
+            <a:ext cx="3246120" cy="2834640"/>
+          </a:xfrm>
+          <a:prstGeom prst="rect">
+            <a:avLst/>
+          </a:prstGeom>
+          <a:noFill/>
+          <a:ln/>
+        </p:spPr>
+        <p:txBody>
+          <a:bodyPr wrap="square" lIns="0" tIns="0" rIns="0" bIns="0" rtlCol="0" anchor="t"/>
+          <a:lstStyle/>
+          <a:p>
+            <a:pPr marL="342900" indent="-342900">
+              <a:spcAft>
+                <a:spcPts val="700"/>
+              </a:spcAft>
+              <a:buSzPct val="100000"/>
+              <a:buChar char="•"/>
+            </a:pPr>
+            <a:r>
+              <a:rPr lang="en-US" sz="1200" dirty="0">
+                <a:solidFill>
+                  <a:schemeClr val="accent5"/>
+                </a:solidFill>
+              </a:rPr>
+              <a:t>Cards under 3 months old are 28% of the base but only 13% of spend, with a median spend of ₹0.</a:t>
+            </a:r>
+            <a:endParaRPr lang="en-US" sz="1200" dirty="0"/>
+          </a:p>
+          <a:p>
+            <a:pPr marL="342900" indent="-342900">
+              <a:spcAft>
+                <a:spcPts val="700"/>
+              </a:spcAft>
+              <a:buSzPct val="100000"/>
+              <a:buChar char="•"/>
+            </a:pPr>
+            <a:r>
+              <a:rPr lang="en-US" sz="1200" dirty="0">
+                <a:solidFill>
+                  <a:schemeClr val="accent5"/>
+                </a:solidFill>
+              </a:rPr>
+              <a:t>So at least 161K new cards spent nothing in June: at least 64% of all zero-spend cards, and more than the whole Jan → Jun rise (+155K).</a:t>
+            </a:r>
+            <a:endParaRPr lang="en-US" sz="1200" dirty="0"/>
+          </a:p>
+          <a:p>
+            <a:pPr marL="342900" indent="-342900">
+              <a:spcAft>
+                <a:spcPts val="700"/>
+              </a:spcAft>
+              <a:buSzPct val="100000"/>
+              <a:buChar char="•"/>
+            </a:pPr>
+            <a:r>
+              <a:rPr lang="en-US" sz="1200" dirty="0">
+                <a:solidFill>
+                  <a:schemeClr val="accent5"/>
+                </a:solidFill>
+              </a:rPr>
+              <a:t>Spend climbs with card age (₹2.1K → ₹3.9K → ₹5.2K → ₹6.3K). New cards haven't stopped spending; they haven't started yet.</a:t>
+            </a:r>
+            <a:endParaRPr lang="en-US" sz="1200" dirty="0"/>
+          </a:p>
+        </p:txBody>
+      </p:sp>
+      <p:sp>
+        <p:nvSpPr>
+          <p:cNvPr id="17" name="Q3 card"/>
+          <p:cNvSpPr/>
+          <p:nvPr/>
+        </p:nvSpPr>
+        <p:spPr>
+          <a:xfrm>
+            <a:off x="8046720" y="1371600"/>
+            <a:ext cx="3611880" cy="4343400"/>
+          </a:xfrm>
+          <a:prstGeom prst="rect">
+            <a:avLst/>
+          </a:prstGeom>
+          <a:solidFill>
+            <a:schemeClr val="bg2"/>
+          </a:solidFill>
+          <a:ln w="12700">
+            <a:solidFill>
+              <a:schemeClr val="bg2"/>
+            </a:solidFill>
+            <a:prstDash val="solid"/>
+          </a:ln>
+        </p:spPr>
+      </p:sp>
+      <p:sp>
+        <p:nvSpPr>
+          <p:cNvPr id="18" name="Q3 bar"/>
+          <p:cNvSpPr/>
+          <p:nvPr/>
+        </p:nvSpPr>
+        <p:spPr>
+          <a:xfrm>
+            <a:off x="8046720" y="1371600"/>
+            <a:ext cx="3611880" cy="64008"/>
+          </a:xfrm>
+          <a:prstGeom prst="rect">
+            <a:avLst/>
+          </a:prstGeom>
+          <a:solidFill>
+            <a:schemeClr val="accent3"/>
+          </a:solidFill>
+          <a:ln w="12700">
+            <a:solidFill>
+              <a:schemeClr val="accent3"/>
+            </a:solidFill>
+            <a:prstDash val="solid"/>
+          </a:ln>
+        </p:spPr>
+      </p:sp>
+      <p:sp>
+        <p:nvSpPr>
+          <p:cNvPr id="19" name="Q3 label"/>
+          <p:cNvSpPr txBox="1"/>
+          <p:nvPr/>
+        </p:nvSpPr>
+        <p:spPr>
+          <a:xfrm>
+            <a:off x="8275320" y="1554480"/>
+            <a:ext cx="731520" cy="365760"/>
+          </a:xfrm>
+          <a:prstGeom prst="rect">
+            <a:avLst/>
+          </a:prstGeom>
+          <a:noFill/>
+          <a:ln/>
+        </p:spPr>
+        <p:txBody>
+          <a:bodyPr wrap="square" lIns="0" tIns="0" rIns="0" bIns="0" rtlCol="0" anchor="ctr"/>
+          <a:lstStyle/>
+          <a:p>
+            <a:pPr indent="0" marL="0">
+              <a:buNone/>
+            </a:pPr>
+            <a:r>
+              <a:rPr lang="en-US" sz="2000" b="1" dirty="0">
+                <a:solidFill>
+                  <a:schemeClr val="tx2"/>
+                </a:solidFill>
+              </a:rPr>
+              <a:t>Q3</a:t>
+            </a:r>
+            <a:endParaRPr lang="en-US" sz="2000" dirty="0"/>
+          </a:p>
+        </p:txBody>
+      </p:sp>
+      <p:sp>
+        <p:nvSpPr>
+          <p:cNvPr id="20" name="Q3 question"/>
+          <p:cNvSpPr txBox="1"/>
+          <p:nvPr/>
+        </p:nvSpPr>
+        <p:spPr>
+          <a:xfrm>
+            <a:off x="8915400" y="1554480"/>
+            <a:ext cx="2606040" cy="411480"/>
+          </a:xfrm>
+          <a:prstGeom prst="rect">
+            <a:avLst/>
+          </a:prstGeom>
+          <a:noFill/>
+          <a:ln/>
+        </p:spPr>
+        <p:txBody>
+          <a:bodyPr wrap="square" lIns="0" tIns="0" rIns="0" bIns="0" rtlCol="0" anchor="ctr"/>
+          <a:lstStyle/>
+          <a:p>
+            <a:pPr indent="0" marL="0">
+              <a:buNone/>
+            </a:pPr>
+            <a:r>
+              <a:rPr lang="en-US" sz="1250" b="1" dirty="0">
+                <a:solidFill>
+                  <a:schemeClr val="tx1"/>
+                </a:solidFill>
+              </a:rPr>
+              <a:t>CEO summary (detail on page 1)</a:t>
+            </a:r>
+            <a:endParaRPr lang="en-US" sz="1250" dirty="0"/>
+          </a:p>
+        </p:txBody>
+      </p:sp>
+      <p:sp>
+        <p:nvSpPr>
+          <p:cNvPr id="21" name="Q3 verdict"/>
+          <p:cNvSpPr txBox="1"/>
+          <p:nvPr/>
+        </p:nvSpPr>
+        <p:spPr>
+          <a:xfrm>
+            <a:off x="8275320" y="2057400"/>
+            <a:ext cx="3200400" cy="685800"/>
+          </a:xfrm>
+          <a:prstGeom prst="rect">
+            <a:avLst/>
+          </a:prstGeom>
+          <a:noFill/>
+          <a:ln/>
+        </p:spPr>
+        <p:txBody>
+          <a:bodyPr wrap="square" lIns="0" tIns="0" rIns="0" bIns="0" rtlCol="0" anchor="t"/>
+          <a:lstStyle/>
+          <a:p>
+            <a:pPr indent="0" marL="0">
+              <a:buNone/>
+            </a:pPr>
+            <a:r>
+              <a:rPr lang="en-US" sz="1300" b="1" dirty="0">
+                <a:solidFill>
+                  <a:schemeClr val="tx2"/>
+                </a:solidFill>
+              </a:rPr>
+              <a:t>Growth is showing up as a decline because the KPI counts cards before they activate.</a:t>
+            </a:r>
+            <a:endParaRPr lang="en-US" sz="1300" dirty="0"/>
+          </a:p>
+        </p:txBody>
+      </p:sp>
+      <p:sp>
+        <p:nvSpPr>
+          <p:cNvPr id="22" name="Q3 evidence"/>
+          <p:cNvSpPr txBox="1"/>
+          <p:nvPr/>
+        </p:nvSpPr>
+        <p:spPr>
+          <a:xfrm>
+            <a:off x="8275320" y="2788920"/>
+            <a:ext cx="3246120" cy="2834640"/>
+          </a:xfrm>
+          <a:prstGeom prst="rect">
+            <a:avLst/>
+          </a:prstGeom>
+          <a:noFill/>
+          <a:ln/>
+        </p:spPr>
+        <p:txBody>
+          <a:bodyPr wrap="square" lIns="0" tIns="0" rIns="0" bIns="0" rtlCol="0" anchor="t"/>
+          <a:lstStyle/>
+          <a:p>
+            <a:pPr marL="342900" indent="-342900">
+              <a:spcAft>
+                <a:spcPts val="700"/>
+              </a:spcAft>
+              <a:buSzPct val="100000"/>
+              <a:buChar char="•"/>
+            </a:pPr>
+            <a:r>
+              <a:rPr lang="en-US" sz="1200" dirty="0">
+                <a:solidFill>
+                  <a:schemeClr val="accent5"/>
+                </a:solidFill>
+              </a:rPr>
+              <a:t>Activation programme for the first 90 days: each 1-pt cut in the zero-spend share adds ~₹540 to spend per active card.</a:t>
+            </a:r>
+            <a:endParaRPr lang="en-US" sz="1200" dirty="0"/>
+          </a:p>
+          <a:p>
+            <a:pPr marL="342900" indent="-342900">
+              <a:spcAft>
+                <a:spcPts val="700"/>
+              </a:spcAft>
+              <a:buSzPct val="100000"/>
+              <a:buChar char="•"/>
+            </a:pPr>
+            <a:r>
+              <a:rPr lang="en-US" sz="1200" dirty="0">
+                <a:solidFill>
+                  <a:schemeClr val="accent5"/>
+                </a:solidFill>
+              </a:rPr>
+              <a:t>Report spend per spending card by card-age cohort next to the blended average.</a:t>
+            </a:r>
+            <a:endParaRPr lang="en-US" sz="1200" dirty="0"/>
+          </a:p>
+          <a:p>
+            <a:pPr marL="342900" indent="-342900">
+              <a:spcAft>
+                <a:spcPts val="700"/>
+              </a:spcAft>
+              <a:buSzPct val="100000"/>
+              <a:buChar char="•"/>
+            </a:pPr>
+            <a:r>
+              <a:rPr lang="en-US" sz="1200" dirty="0">
+                <a:solidFill>
+                  <a:schemeClr val="accent5"/>
+                </a:solidFill>
+              </a:rPr>
+              <a:t>Watch the May–Jun softening and travel share against last year before acting on it.</a:t>
+            </a:r>
+            <a:endParaRPr lang="en-US" sz="1200" dirty="0"/>
+          </a:p>
+          <a:p>
+            <a:pPr marL="342900" indent="-342900">
+              <a:spcAft>
+                <a:spcPts val="700"/>
+              </a:spcAft>
+              <a:buSzPct val="100000"/>
+              <a:buChar char="•"/>
+            </a:pPr>
+            <a:r>
+              <a:rPr lang="en-US" sz="1200" dirty="0">
+                <a:solidFill>
+                  <a:schemeClr val="accent5"/>
+                </a:solidFill>
+              </a:rPr>
+              <a:t>Ask: cohort-level monthly spend and one agreed definition of an "active" card.</a:t>
+            </a:r>
+            <a:endParaRPr lang="en-US" sz="1200" dirty="0"/>
+          </a:p>
+        </p:txBody>
+      </p:sp>
+      <p:sp>
+        <p:nvSpPr>
+          <p:cNvPr id="23" name="Data note band"/>
+          <p:cNvSpPr/>
+          <p:nvPr/>
+        </p:nvSpPr>
+        <p:spPr>
+          <a:xfrm>
+            <a:off x="457200" y="5833872"/>
+            <a:ext cx="11247120" cy="502920"/>
+          </a:xfrm>
+          <a:prstGeom prst="rect">
+            <a:avLst/>
+          </a:prstGeom>
+          <a:solidFill>
+            <a:srgbClr val="FFF4EE"/>
+          </a:solidFill>
+          <a:ln w="12700">
+            <a:solidFill>
+              <a:srgbClr val="FFF4EE"/>
+            </a:solidFill>
+            <a:prstDash val="solid"/>
+          </a:ln>
+        </p:spPr>
+      </p:sp>
+      <p:sp>
+        <p:nvSpPr>
+          <p:cNvPr id="24" name="Data note"/>
+          <p:cNvSpPr txBox="1"/>
+          <p:nvPr/>
+        </p:nvSpPr>
+        <p:spPr>
+          <a:xfrm>
+            <a:off x="640080" y="5870448"/>
+            <a:ext cx="10881360" cy="429768"/>
+          </a:xfrm>
+          <a:prstGeom prst="rect">
+            <a:avLst/>
+          </a:prstGeom>
+          <a:noFill/>
+          <a:ln/>
+        </p:spPr>
+        <p:txBody>
+          <a:bodyPr wrap="square" lIns="0" tIns="0" rIns="0" bIns="0" rtlCol="0" anchor="ctr"/>
+          <a:lstStyle/>
+          <a:p>
+            <a:pPr indent="0" marL="0">
+              <a:buNone/>
+            </a:pPr>
+            <a:r>
+              <a:rPr lang="en-US" sz="1000" b="1" dirty="0">
+                <a:solidFill>
+                  <a:schemeClr val="accent2"/>
+                </a:solidFill>
+              </a:rPr>
+              <a:t>Data note: </a:t>
+            </a:r>
+            <a:pPr indent="0" marL="0">
+              <a:buNone/>
+            </a:pPr>
+            <a:r>
+              <a:rPr lang="en-US" sz="1000" dirty="0">
+                <a:solidFill>
+                  <a:schemeClr val="tx1"/>
+                </a:solidFill>
+              </a:rPr>
+              <a:t>the tables don't reconcile. June spend per card is ₹42K in Table 1, ₹4.5K in Table 3 and at least ₹5.75K in Table 2, so units or the "active" definition differ. All conclusions use relative measures (shares, % changes) and hold either way.</a:t>
+            </a:r>
+            <a:endParaRPr lang="en-US" sz="1000" dirty="0"/>
           </a:p>
         </p:txBody>
       </p:sp>
